--- a/assets/TCS302/Unit-2/Lecture15_Introduction_to_Linked_Lists.pptx
+++ b/assets/TCS302/Unit-2/Lecture15_Introduction_to_Linked_Lists.pptx
@@ -2729,8 +2729,8 @@
         </p:nvSpPr>
         <p:spPr>
           <a:xfrm>
-            <a:off x="457200" y="1234440"/>
-            <a:ext cx="8229600" cy="1188720"/>
+            <a:off x="457200" y="1421476"/>
+            <a:ext cx="8229600" cy="764771"/>
           </a:xfrm>
           <a:prstGeom prst="roundRect">
             <a:avLst>
@@ -2888,90 +2888,6 @@
               <a:t>This is exactly the same responsibility top carried for the stack, and front carried for the queue.</a:t>
             </a:r>
             <a:endParaRPr lang="en-US" sz="1350" dirty="0"/>
-          </a:p>
-        </p:txBody>
-      </p:sp>
-      <p:sp>
-        <p:nvSpPr>
-          <p:cNvPr id="9" name="Shape 7"/>
-          <p:cNvSpPr/>
-          <p:nvPr/>
-        </p:nvSpPr>
-        <p:spPr>
-          <a:xfrm>
-            <a:off x="457200" y="4160520"/>
-            <a:ext cx="8229600" cy="502920"/>
-          </a:xfrm>
-          <a:prstGeom prst="roundRect">
-            <a:avLst>
-              <a:gd name="adj" fmla="val 12727"/>
-            </a:avLst>
-          </a:prstGeom>
-          <a:solidFill>
-            <a:srgbClr val="EEF3FB"/>
-          </a:solidFill>
-          <a:ln w="12700">
-            <a:solidFill>
-              <a:srgbClr val="1E2761"/>
-            </a:solidFill>
-            <a:prstDash val="solid"/>
-          </a:ln>
-        </p:spPr>
-        <p:txBody>
-          <a:bodyPr/>
-          <a:lstStyle/>
-          <a:p>
-            <a:endParaRPr lang="en-US"/>
-          </a:p>
-        </p:txBody>
-      </p:sp>
-      <p:sp>
-        <p:nvSpPr>
-          <p:cNvPr id="10" name="Text 8"/>
-          <p:cNvSpPr/>
-          <p:nvPr/>
-        </p:nvSpPr>
-        <p:spPr>
-          <a:xfrm>
-            <a:off x="640080" y="4160520"/>
-            <a:ext cx="7863840" cy="502920"/>
-          </a:xfrm>
-          <a:prstGeom prst="rect">
-            <a:avLst/>
-          </a:prstGeom>
-          <a:noFill/>
-          <a:ln/>
-        </p:spPr>
-        <p:txBody>
-          <a:bodyPr wrap="square" lIns="0" tIns="0" rIns="0" bIns="0" rtlCol="0" anchor="ctr"/>
-          <a:lstStyle/>
-          <a:p>
-            <a:pPr marL="0" indent="0">
-              <a:buNone/>
-            </a:pPr>
-            <a:r>
-              <a:rPr lang="en-US" sz="1200" b="1" dirty="0">
-                <a:solidFill>
-                  <a:srgbClr val="1E2761"/>
-                </a:solidFill>
-                <a:latin typeface="Calibri" pitchFamily="34" charset="0"/>
-                <a:ea typeface="Calibri" pitchFamily="34" charset="-122"/>
-                <a:cs typeface="Calibri" pitchFamily="34" charset="-120"/>
-              </a:rPr>
-              <a:t>ASK   </a:t>
-            </a:r>
-            <a:r>
-              <a:rPr lang="en-US" sz="1250" i="1" dirty="0">
-                <a:solidFill>
-                  <a:srgbClr val="2B2B2B"/>
-                </a:solidFill>
-                <a:latin typeface="Calibri" pitchFamily="34" charset="0"/>
-                <a:ea typeface="Calibri" pitchFamily="34" charset="-122"/>
-                <a:cs typeface="Calibri" pitchFamily="34" charset="-120"/>
-              </a:rPr>
-              <a:t>If you wrote head = second; right now, what happens to the node holding 10?</a:t>
-            </a:r>
-            <a:endParaRPr lang="en-US" sz="1200" dirty="0"/>
           </a:p>
         </p:txBody>
       </p:sp>
@@ -3707,7 +3623,7 @@
         </p:nvGraphicFramePr>
         <p:xfrm>
           <a:off x="457200" y="1234440"/>
-          <a:ext cx="8229600" cy="914400"/>
+          <a:ext cx="8229600" cy="3072384"/>
         </p:xfrm>
         <a:graphic>
           <a:graphicData uri="http://schemas.openxmlformats.org/drawingml/2006/table">
@@ -5322,45 +5238,6 @@
           </a:p>
         </p:txBody>
       </p:sp>
-      <p:sp>
-        <p:nvSpPr>
-          <p:cNvPr id="7" name="Text 5"/>
-          <p:cNvSpPr/>
-          <p:nvPr/>
-        </p:nvSpPr>
-        <p:spPr>
-          <a:xfrm>
-            <a:off x="640080" y="4828032"/>
-            <a:ext cx="7863840" cy="256032"/>
-          </a:xfrm>
-          <a:prstGeom prst="rect">
-            <a:avLst/>
-          </a:prstGeom>
-          <a:noFill/>
-          <a:ln/>
-        </p:spPr>
-        <p:txBody>
-          <a:bodyPr wrap="square" lIns="0" tIns="0" rIns="0" bIns="0" rtlCol="0" anchor="ctr"/>
-          <a:lstStyle/>
-          <a:p>
-            <a:pPr marL="0" indent="0">
-              <a:buNone/>
-            </a:pPr>
-            <a:r>
-              <a:rPr lang="en-US" sz="1050" i="1" dirty="0">
-                <a:solidFill>
-                  <a:srgbClr val="CADCFC"/>
-                </a:solidFill>
-                <a:latin typeface="Calibri" pitchFamily="34" charset="0"/>
-                <a:ea typeface="Calibri" pitchFamily="34" charset="-122"/>
-                <a:cs typeface="Calibri" pitchFamily="34" charset="-120"/>
-              </a:rPr>
-              <a:t>Next lecture: building lists with a loop, traversal, and searching</a:t>
-            </a:r>
-            <a:endParaRPr lang="en-US" sz="1050" dirty="0"/>
-          </a:p>
-        </p:txBody>
-      </p:sp>
     </p:spTree>
   </p:cSld>
   <p:clrMapOvr>
@@ -5721,7 +5598,7 @@
         <p:spPr>
           <a:xfrm>
             <a:off x="457200" y="3200400"/>
-            <a:ext cx="8229600" cy="1371600"/>
+            <a:ext cx="8229600" cy="1022465"/>
           </a:xfrm>
           <a:prstGeom prst="rect">
             <a:avLst/>
@@ -5773,90 +5650,6 @@
               <a:t>A linked list solves BOTH problems at once: it grows one node at a time, and inserting is just rewiring two pointers — no shifting.</a:t>
             </a:r>
             <a:endParaRPr lang="en-US" sz="1350" dirty="0"/>
-          </a:p>
-        </p:txBody>
-      </p:sp>
-      <p:sp>
-        <p:nvSpPr>
-          <p:cNvPr id="11" name="Shape 9"/>
-          <p:cNvSpPr/>
-          <p:nvPr/>
-        </p:nvSpPr>
-        <p:spPr>
-          <a:xfrm>
-            <a:off x="457200" y="4160520"/>
-            <a:ext cx="8229600" cy="502920"/>
-          </a:xfrm>
-          <a:prstGeom prst="roundRect">
-            <a:avLst>
-              <a:gd name="adj" fmla="val 12727"/>
-            </a:avLst>
-          </a:prstGeom>
-          <a:solidFill>
-            <a:srgbClr val="EEF3FB"/>
-          </a:solidFill>
-          <a:ln w="12700">
-            <a:solidFill>
-              <a:srgbClr val="1E2761"/>
-            </a:solidFill>
-            <a:prstDash val="solid"/>
-          </a:ln>
-        </p:spPr>
-        <p:txBody>
-          <a:bodyPr/>
-          <a:lstStyle/>
-          <a:p>
-            <a:endParaRPr lang="en-US"/>
-          </a:p>
-        </p:txBody>
-      </p:sp>
-      <p:sp>
-        <p:nvSpPr>
-          <p:cNvPr id="12" name="Text 10"/>
-          <p:cNvSpPr/>
-          <p:nvPr/>
-        </p:nvSpPr>
-        <p:spPr>
-          <a:xfrm>
-            <a:off x="640080" y="4160520"/>
-            <a:ext cx="7863840" cy="502920"/>
-          </a:xfrm>
-          <a:prstGeom prst="rect">
-            <a:avLst/>
-          </a:prstGeom>
-          <a:noFill/>
-          <a:ln/>
-        </p:spPr>
-        <p:txBody>
-          <a:bodyPr wrap="square" lIns="0" tIns="0" rIns="0" bIns="0" rtlCol="0" anchor="ctr"/>
-          <a:lstStyle/>
-          <a:p>
-            <a:pPr marL="0" indent="0">
-              <a:buNone/>
-            </a:pPr>
-            <a:r>
-              <a:rPr lang="en-US" sz="1200" b="1" dirty="0">
-                <a:solidFill>
-                  <a:srgbClr val="1E2761"/>
-                </a:solidFill>
-                <a:latin typeface="Calibri" pitchFamily="34" charset="0"/>
-                <a:ea typeface="Calibri" pitchFamily="34" charset="-122"/>
-                <a:cs typeface="Calibri" pitchFamily="34" charset="-120"/>
-              </a:rPr>
-              <a:t>ASK   </a:t>
-            </a:r>
-            <a:r>
-              <a:rPr lang="en-US" sz="1250" i="1" dirty="0">
-                <a:solidFill>
-                  <a:srgbClr val="2B2B2B"/>
-                </a:solidFill>
-                <a:latin typeface="Calibri" pitchFamily="34" charset="0"/>
-                <a:ea typeface="Calibri" pitchFamily="34" charset="-122"/>
-                <a:cs typeface="Calibri" pitchFamily="34" charset="-120"/>
-              </a:rPr>
-              <a:t>You already built a chain of malloc'd nodes twice this unit. Where?</a:t>
-            </a:r>
-            <a:endParaRPr lang="en-US" sz="1200" dirty="0"/>
           </a:p>
         </p:txBody>
       </p:sp>
@@ -7803,90 +7596,6 @@
           </a:p>
         </p:txBody>
       </p:sp>
-      <p:sp>
-        <p:nvSpPr>
-          <p:cNvPr id="11" name="Shape 9"/>
-          <p:cNvSpPr/>
-          <p:nvPr/>
-        </p:nvSpPr>
-        <p:spPr>
-          <a:xfrm>
-            <a:off x="457200" y="4343398"/>
-            <a:ext cx="8229600" cy="502920"/>
-          </a:xfrm>
-          <a:prstGeom prst="roundRect">
-            <a:avLst>
-              <a:gd name="adj" fmla="val 12727"/>
-            </a:avLst>
-          </a:prstGeom>
-          <a:solidFill>
-            <a:srgbClr val="EEF3FB"/>
-          </a:solidFill>
-          <a:ln w="12700">
-            <a:solidFill>
-              <a:srgbClr val="1E2761"/>
-            </a:solidFill>
-            <a:prstDash val="solid"/>
-          </a:ln>
-        </p:spPr>
-        <p:txBody>
-          <a:bodyPr/>
-          <a:lstStyle/>
-          <a:p>
-            <a:endParaRPr lang="en-US"/>
-          </a:p>
-        </p:txBody>
-      </p:sp>
-      <p:sp>
-        <p:nvSpPr>
-          <p:cNvPr id="12" name="Text 10"/>
-          <p:cNvSpPr/>
-          <p:nvPr/>
-        </p:nvSpPr>
-        <p:spPr>
-          <a:xfrm>
-            <a:off x="640080" y="4343398"/>
-            <a:ext cx="7863840" cy="502920"/>
-          </a:xfrm>
-          <a:prstGeom prst="rect">
-            <a:avLst/>
-          </a:prstGeom>
-          <a:noFill/>
-          <a:ln/>
-        </p:spPr>
-        <p:txBody>
-          <a:bodyPr wrap="square" lIns="0" tIns="0" rIns="0" bIns="0" rtlCol="0" anchor="ctr"/>
-          <a:lstStyle/>
-          <a:p>
-            <a:pPr marL="0" indent="0">
-              <a:buNone/>
-            </a:pPr>
-            <a:r>
-              <a:rPr lang="en-US" sz="1200" b="1" dirty="0">
-                <a:solidFill>
-                  <a:srgbClr val="1E2761"/>
-                </a:solidFill>
-                <a:latin typeface="Calibri" pitchFamily="34" charset="0"/>
-                <a:ea typeface="Calibri" pitchFamily="34" charset="-122"/>
-                <a:cs typeface="Calibri" pitchFamily="34" charset="-120"/>
-              </a:rPr>
-              <a:t>ASK   </a:t>
-            </a:r>
-            <a:r>
-              <a:rPr lang="en-US" sz="1250" i="1" dirty="0">
-                <a:solidFill>
-                  <a:srgbClr val="2B2B2B"/>
-                </a:solidFill>
-                <a:latin typeface="Calibri" pitchFamily="34" charset="0"/>
-                <a:ea typeface="Calibri" pitchFamily="34" charset="-122"/>
-                <a:cs typeface="Calibri" pitchFamily="34" charset="-120"/>
-              </a:rPr>
-              <a:t>You have used malloc twice already this unit. In which two functions, and for which struct?</a:t>
-            </a:r>
-            <a:endParaRPr lang="en-US" sz="1200" dirty="0"/>
-          </a:p>
-        </p:txBody>
-      </p:sp>
     </p:spTree>
   </p:cSld>
   <p:clrMapOvr>
@@ -9423,7 +9132,7 @@
         </p:nvSpPr>
         <p:spPr>
           <a:xfrm>
-            <a:off x="914400" y="3246120"/>
+            <a:off x="914400" y="3703321"/>
             <a:ext cx="1188720" cy="502920"/>
           </a:xfrm>
           <a:prstGeom prst="rect">
@@ -9455,7 +9164,7 @@
         </p:nvSpPr>
         <p:spPr>
           <a:xfrm>
-            <a:off x="1651406" y="3246120"/>
+            <a:off x="1651406" y="3703321"/>
             <a:ext cx="0" cy="502920"/>
           </a:xfrm>
           <a:prstGeom prst="line">
@@ -9485,7 +9194,7 @@
         </p:nvSpPr>
         <p:spPr>
           <a:xfrm>
-            <a:off x="914400" y="3246120"/>
+            <a:off x="914400" y="3703321"/>
             <a:ext cx="737006" cy="502920"/>
           </a:xfrm>
           <a:prstGeom prst="rect">
@@ -9524,7 +9233,7 @@
         </p:nvSpPr>
         <p:spPr>
           <a:xfrm>
-            <a:off x="1651406" y="3246120"/>
+            <a:off x="1651406" y="3703321"/>
             <a:ext cx="451714" cy="502920"/>
           </a:xfrm>
           <a:prstGeom prst="rect">
@@ -9563,7 +9272,7 @@
         </p:nvSpPr>
         <p:spPr>
           <a:xfrm>
-            <a:off x="2514600" y="3246120"/>
+            <a:off x="2514600" y="3703321"/>
             <a:ext cx="1188720" cy="502920"/>
           </a:xfrm>
           <a:prstGeom prst="rect">
@@ -9595,7 +9304,7 @@
         </p:nvSpPr>
         <p:spPr>
           <a:xfrm>
-            <a:off x="3251606" y="3246120"/>
+            <a:off x="3251606" y="3703321"/>
             <a:ext cx="0" cy="502920"/>
           </a:xfrm>
           <a:prstGeom prst="line">
@@ -9625,7 +9334,7 @@
         </p:nvSpPr>
         <p:spPr>
           <a:xfrm>
-            <a:off x="2514600" y="3246120"/>
+            <a:off x="2514600" y="3703321"/>
             <a:ext cx="737006" cy="502920"/>
           </a:xfrm>
           <a:prstGeom prst="rect">
@@ -9664,7 +9373,7 @@
         </p:nvSpPr>
         <p:spPr>
           <a:xfrm>
-            <a:off x="3251606" y="3246120"/>
+            <a:off x="3251606" y="3703321"/>
             <a:ext cx="451714" cy="502920"/>
           </a:xfrm>
           <a:prstGeom prst="rect">
@@ -9703,7 +9412,7 @@
         </p:nvSpPr>
         <p:spPr>
           <a:xfrm>
-            <a:off x="2103120" y="3246120"/>
+            <a:off x="2103120" y="3703321"/>
             <a:ext cx="411480" cy="502920"/>
           </a:xfrm>
           <a:prstGeom prst="rect">
@@ -9742,7 +9451,7 @@
         </p:nvSpPr>
         <p:spPr>
           <a:xfrm>
-            <a:off x="3794760" y="3246120"/>
+            <a:off x="3794760" y="3703321"/>
             <a:ext cx="1005840" cy="502920"/>
           </a:xfrm>
           <a:prstGeom prst="rect">
@@ -9781,7 +9490,7 @@
         </p:nvSpPr>
         <p:spPr>
           <a:xfrm>
-            <a:off x="914400" y="2880360"/>
+            <a:off x="914400" y="3337561"/>
             <a:ext cx="1188720" cy="274320"/>
           </a:xfrm>
           <a:prstGeom prst="rect">
@@ -9820,8 +9529,8 @@
         </p:nvSpPr>
         <p:spPr>
           <a:xfrm>
-            <a:off x="5257800" y="1371600"/>
-            <a:ext cx="3429000" cy="2743200"/>
+            <a:off x="5715000" y="1371600"/>
+            <a:ext cx="2971800" cy="1828800"/>
           </a:xfrm>
           <a:prstGeom prst="rect">
             <a:avLst/>
@@ -10251,7 +9960,7 @@
         </p:nvSpPr>
         <p:spPr>
           <a:xfrm>
-            <a:off x="914400" y="3246120"/>
+            <a:off x="914400" y="3695008"/>
             <a:ext cx="1188720" cy="502920"/>
           </a:xfrm>
           <a:prstGeom prst="rect">
@@ -10283,7 +9992,7 @@
         </p:nvSpPr>
         <p:spPr>
           <a:xfrm>
-            <a:off x="1651406" y="3246120"/>
+            <a:off x="1651406" y="3695008"/>
             <a:ext cx="0" cy="502920"/>
           </a:xfrm>
           <a:prstGeom prst="line">
@@ -10313,7 +10022,7 @@
         </p:nvSpPr>
         <p:spPr>
           <a:xfrm>
-            <a:off x="914400" y="3246120"/>
+            <a:off x="914400" y="3695008"/>
             <a:ext cx="737006" cy="502920"/>
           </a:xfrm>
           <a:prstGeom prst="rect">
@@ -10352,7 +10061,7 @@
         </p:nvSpPr>
         <p:spPr>
           <a:xfrm>
-            <a:off x="1651406" y="3246120"/>
+            <a:off x="1651406" y="3695008"/>
             <a:ext cx="451714" cy="502920"/>
           </a:xfrm>
           <a:prstGeom prst="rect">
@@ -10391,7 +10100,7 @@
         </p:nvSpPr>
         <p:spPr>
           <a:xfrm>
-            <a:off x="2514600" y="3246120"/>
+            <a:off x="2514600" y="3695008"/>
             <a:ext cx="1188720" cy="502920"/>
           </a:xfrm>
           <a:prstGeom prst="rect">
@@ -10423,7 +10132,7 @@
         </p:nvSpPr>
         <p:spPr>
           <a:xfrm>
-            <a:off x="3251606" y="3246120"/>
+            <a:off x="3251606" y="3695008"/>
             <a:ext cx="0" cy="502920"/>
           </a:xfrm>
           <a:prstGeom prst="line">
@@ -10453,7 +10162,7 @@
         </p:nvSpPr>
         <p:spPr>
           <a:xfrm>
-            <a:off x="2514600" y="3246120"/>
+            <a:off x="2514600" y="3695008"/>
             <a:ext cx="737006" cy="502920"/>
           </a:xfrm>
           <a:prstGeom prst="rect">
@@ -10492,7 +10201,7 @@
         </p:nvSpPr>
         <p:spPr>
           <a:xfrm>
-            <a:off x="3251606" y="3246120"/>
+            <a:off x="3251606" y="3695008"/>
             <a:ext cx="451714" cy="502920"/>
           </a:xfrm>
           <a:prstGeom prst="rect">
@@ -10531,7 +10240,7 @@
         </p:nvSpPr>
         <p:spPr>
           <a:xfrm>
-            <a:off x="4114800" y="3246120"/>
+            <a:off x="4114800" y="3695008"/>
             <a:ext cx="1188720" cy="502920"/>
           </a:xfrm>
           <a:prstGeom prst="rect">
@@ -10563,7 +10272,7 @@
         </p:nvSpPr>
         <p:spPr>
           <a:xfrm>
-            <a:off x="4851806" y="3246120"/>
+            <a:off x="4851806" y="3695008"/>
             <a:ext cx="0" cy="502920"/>
           </a:xfrm>
           <a:prstGeom prst="line">
@@ -10593,7 +10302,7 @@
         </p:nvSpPr>
         <p:spPr>
           <a:xfrm>
-            <a:off x="4114800" y="3246120"/>
+            <a:off x="4114800" y="3695008"/>
             <a:ext cx="737006" cy="502920"/>
           </a:xfrm>
           <a:prstGeom prst="rect">
@@ -10632,7 +10341,7 @@
         </p:nvSpPr>
         <p:spPr>
           <a:xfrm>
-            <a:off x="4851806" y="3246120"/>
+            <a:off x="4851806" y="3695008"/>
             <a:ext cx="451714" cy="502920"/>
           </a:xfrm>
           <a:prstGeom prst="rect">
@@ -10671,7 +10380,7 @@
         </p:nvSpPr>
         <p:spPr>
           <a:xfrm>
-            <a:off x="2103120" y="3246120"/>
+            <a:off x="2103120" y="3695008"/>
             <a:ext cx="411480" cy="502920"/>
           </a:xfrm>
           <a:prstGeom prst="rect">
@@ -10710,7 +10419,7 @@
         </p:nvSpPr>
         <p:spPr>
           <a:xfrm>
-            <a:off x="3703320" y="3246120"/>
+            <a:off x="3703320" y="3695008"/>
             <a:ext cx="411480" cy="502920"/>
           </a:xfrm>
           <a:prstGeom prst="rect">
@@ -10749,7 +10458,7 @@
         </p:nvSpPr>
         <p:spPr>
           <a:xfrm>
-            <a:off x="5394960" y="3246120"/>
+            <a:off x="5394960" y="3695008"/>
             <a:ext cx="914400" cy="502920"/>
           </a:xfrm>
           <a:prstGeom prst="rect">
@@ -10788,7 +10497,7 @@
         </p:nvSpPr>
         <p:spPr>
           <a:xfrm>
-            <a:off x="914400" y="2880360"/>
+            <a:off x="914400" y="3329248"/>
             <a:ext cx="1188720" cy="274320"/>
           </a:xfrm>
           <a:prstGeom prst="rect">
@@ -10827,8 +10536,8 @@
         </p:nvSpPr>
         <p:spPr>
           <a:xfrm>
-            <a:off x="5257800" y="1463040"/>
-            <a:ext cx="3429000" cy="2377440"/>
+            <a:off x="5892392" y="1463040"/>
+            <a:ext cx="2794407" cy="2377440"/>
           </a:xfrm>
           <a:prstGeom prst="rect">
             <a:avLst/>
@@ -10880,90 +10589,6 @@
               <a:t>A 3-node list needed exactly 3 mallocs and 2 linking lines — the pattern scales by repetition, which is exactly what a loop will do in Lecture 16.</a:t>
             </a:r>
             <a:endParaRPr lang="en-US" sz="1300" dirty="0"/>
-          </a:p>
-        </p:txBody>
-      </p:sp>
-      <p:sp>
-        <p:nvSpPr>
-          <p:cNvPr id="25" name="Shape 23"/>
-          <p:cNvSpPr/>
-          <p:nvPr/>
-        </p:nvSpPr>
-        <p:spPr>
-          <a:xfrm>
-            <a:off x="5257800" y="3977640"/>
-            <a:ext cx="3429000" cy="777240"/>
-          </a:xfrm>
-          <a:prstGeom prst="roundRect">
-            <a:avLst>
-              <a:gd name="adj" fmla="val 8235"/>
-            </a:avLst>
-          </a:prstGeom>
-          <a:solidFill>
-            <a:srgbClr val="EEF3FB"/>
-          </a:solidFill>
-          <a:ln w="12700">
-            <a:solidFill>
-              <a:srgbClr val="1E2761"/>
-            </a:solidFill>
-            <a:prstDash val="solid"/>
-          </a:ln>
-        </p:spPr>
-        <p:txBody>
-          <a:bodyPr/>
-          <a:lstStyle/>
-          <a:p>
-            <a:endParaRPr lang="en-US"/>
-          </a:p>
-        </p:txBody>
-      </p:sp>
-      <p:sp>
-        <p:nvSpPr>
-          <p:cNvPr id="26" name="Text 24"/>
-          <p:cNvSpPr/>
-          <p:nvPr/>
-        </p:nvSpPr>
-        <p:spPr>
-          <a:xfrm>
-            <a:off x="5440680" y="3977640"/>
-            <a:ext cx="3063240" cy="777240"/>
-          </a:xfrm>
-          <a:prstGeom prst="rect">
-            <a:avLst/>
-          </a:prstGeom>
-          <a:noFill/>
-          <a:ln/>
-        </p:spPr>
-        <p:txBody>
-          <a:bodyPr wrap="square" lIns="0" tIns="0" rIns="0" bIns="0" rtlCol="0" anchor="ctr"/>
-          <a:lstStyle/>
-          <a:p>
-            <a:pPr marL="0" indent="0">
-              <a:buNone/>
-            </a:pPr>
-            <a:r>
-              <a:rPr lang="en-US" sz="1200" b="1" dirty="0">
-                <a:solidFill>
-                  <a:srgbClr val="1E2761"/>
-                </a:solidFill>
-                <a:latin typeface="Calibri" pitchFamily="34" charset="0"/>
-                <a:ea typeface="Calibri" pitchFamily="34" charset="-122"/>
-                <a:cs typeface="Calibri" pitchFamily="34" charset="-120"/>
-              </a:rPr>
-              <a:t>ASK   </a:t>
-            </a:r>
-            <a:r>
-              <a:rPr lang="en-US" sz="1250" i="1" dirty="0">
-                <a:solidFill>
-                  <a:srgbClr val="2B2B2B"/>
-                </a:solidFill>
-                <a:latin typeface="Calibri" pitchFamily="34" charset="0"/>
-                <a:ea typeface="Calibri" pitchFamily="34" charset="-122"/>
-                <a:cs typeface="Calibri" pitchFamily="34" charset="-120"/>
-              </a:rPr>
-              <a:t>To add a FOURTH node, which single pointer's -&gt;next would you set?</a:t>
-            </a:r>
-            <a:endParaRPr lang="en-US" sz="1200" dirty="0"/>
           </a:p>
         </p:txBody>
       </p:sp>
